--- a/templates/decks/en/nvidia-overview/template.pptx
+++ b/templates/decks/en/nvidia-overview/template.pptx
@@ -26187,7 +26187,7 @@
                 </a:solidFill>
                 <a:latin typeface="Consolas"/>
               </a:rPr>
-              <a:t>Hopper · Blackwell · GB200 NVL72 · DGX · networking</a:t>
+              <a:t>Hopper · Blackwell · GB200 · DGX · networking</a:t>
             </a:r>
           </a:p>
         </p:txBody>
@@ -26487,7 +26487,7 @@
                 </a:solidFill>
                 <a:latin typeface="Consolas"/>
               </a:rPr>
-              <a:t>GeForce RTX 50 (Blackwell) · DLSS 4 · GeForce NOW</a:t>
+              <a:t>GeForce RTX 50 · DLSS 4 · GeForce NOW</a:t>
             </a:r>
           </a:p>
         </p:txBody>
